--- a/courses/build/mentor-3day/M-D3.pptx
+++ b/courses/build/mentor-3day/M-D3.pptx
@@ -4838,7 +4838,7 @@
     <p:bg>
       <p:bgPr>
         <a:solidFill>
-          <a:srgbClr val="1F4D2B"/>
+          <a:srgbClr val="2E3440"/>
         </a:solidFill>
         <a:effectLst/>
       </p:bgPr>
@@ -4880,9 +4880,9 @@
             <a:r>
               <a:rPr sz="1000" b="0">
                 <a:solidFill>
-                  <a:srgbClr val="A8D88A"/>
-                </a:solidFill>
-                <a:latin typeface="Arial"/>
+                  <a:srgbClr val="FAF7F0"/>
+                </a:solidFill>
+                <a:latin typeface="Calibri"/>
               </a:rPr>
               <a:t>M-D3-01</a:t>
             </a:r>
@@ -4919,9 +4919,9 @@
             <a:r>
               <a:rPr sz="1000" b="0">
                 <a:solidFill>
-                  <a:srgbClr val="A8D88A"/>
-                </a:solidFill>
-                <a:latin typeface="Arial"/>
+                  <a:srgbClr val="FAF7F0"/>
+                </a:solidFill>
+                <a:latin typeface="Calibri"/>
               </a:rPr>
               <a:t>Walking With Farmers</a:t>
             </a:r>
@@ -4958,7 +4958,7 @@
             <a:r>
               <a:rPr sz="4800" b="1">
                 <a:solidFill>
-                  <a:srgbClr val="F7F2E9"/>
+                  <a:srgbClr val="FAF7F0"/>
                 </a:solidFill>
                 <a:latin typeface="Georgia"/>
               </a:rPr>
@@ -4982,7 +4982,7 @@
             <a:avLst/>
           </a:prstGeom>
           <a:solidFill>
-            <a:srgbClr val="C07A1E"/>
+            <a:srgbClr val="D9622B"/>
           </a:solidFill>
           <a:ln>
             <a:noFill/>
@@ -5041,9 +5041,9 @@
             <a:r>
               <a:rPr sz="2400" b="0">
                 <a:solidFill>
-                  <a:srgbClr val="A8D88A"/>
-                </a:solidFill>
-                <a:latin typeface="Arial"/>
+                  <a:srgbClr val="FAF7F0"/>
+                </a:solidFill>
+                <a:latin typeface="Calibri"/>
               </a:rPr>
               <a:t>Walking With Farmers</a:t>
             </a:r>
@@ -5057,9 +5057,9 @@
             <a:r>
               <a:rPr sz="2400" b="0">
                 <a:solidFill>
-                  <a:srgbClr val="A8D88A"/>
-                </a:solidFill>
-                <a:latin typeface="Arial"/>
+                  <a:srgbClr val="FAF7F0"/>
+                </a:solidFill>
+                <a:latin typeface="Calibri"/>
               </a:rPr>
               <a:t>Day 3 of 3: the season</a:t>
             </a:r>
@@ -5081,11 +5081,11 @@
             <a:avLst/>
           </a:prstGeom>
           <a:solidFill>
-            <a:srgbClr val="FBF6EC"/>
+            <a:srgbClr val="FAF7F0"/>
           </a:solidFill>
           <a:ln w="15875">
             <a:solidFill>
-              <a:srgbClr val="E2D8C4"/>
+              <a:srgbClr val="6E9CC4"/>
             </a:solidFill>
           </a:ln>
           <a:effectLst/>
@@ -5142,9 +5142,9 @@
             <a:r>
               <a:rPr sz="1200" b="1">
                 <a:solidFill>
-                  <a:srgbClr val="C07A1E"/>
-                </a:solidFill>
-                <a:latin typeface="Arial"/>
+                  <a:srgbClr val="D9622B"/>
+                </a:solidFill>
+                <a:latin typeface="Calibri"/>
               </a:rPr>
               <a:t>IMAGE · M-IMG-01 · coming</a:t>
             </a:r>
@@ -5181,7 +5181,7 @@
             <a:r>
               <a:rPr sz="1800" b="1">
                 <a:solidFill>
-                  <a:srgbClr val="1F4D2B"/>
+                  <a:srgbClr val="232323"/>
                 </a:solidFill>
                 <a:latin typeface="Georgia"/>
               </a:rPr>
@@ -5220,9 +5220,9 @@
             <a:r>
               <a:rPr sz="1100" b="0">
                 <a:solidFill>
-                  <a:srgbClr val="20190F"/>
-                </a:solidFill>
-                <a:latin typeface="Arial"/>
+                  <a:srgbClr val="232323"/>
+                </a:solidFill>
+                <a:latin typeface="Calibri"/>
               </a:rPr>
               <a:t>Cover image for all decks. Early morning; the mentor greets the farmer at a wire-and- dropper garden gate, both smiling, a vegetable garden behind with mulched beds and a JoJo-style tank beside a corrugated-iron roof. Sun low in the north-east, long shadows falling south-west. 16:9, 1920 × 1080, space on the left third for the slide title.</a:t>
             </a:r>
@@ -5243,7 +5243,7 @@
     <p:bg>
       <p:bgPr>
         <a:solidFill>
-          <a:srgbClr val="F7F2E9"/>
+          <a:srgbClr val="FAF7F0"/>
         </a:solidFill>
         <a:effectLst/>
       </p:bgPr>
@@ -5285,9 +5285,9 @@
             <a:r>
               <a:rPr sz="1000" b="0">
                 <a:solidFill>
-                  <a:srgbClr val="6B6255"/>
-                </a:solidFill>
-                <a:latin typeface="Arial"/>
+                  <a:srgbClr val="232323"/>
+                </a:solidFill>
+                <a:latin typeface="Calibri"/>
               </a:rPr>
               <a:t>M-D3-10   ·   Poster M-P13</a:t>
             </a:r>
@@ -5324,9 +5324,9 @@
             <a:r>
               <a:rPr sz="1000" b="0">
                 <a:solidFill>
-                  <a:srgbClr val="6B6255"/>
-                </a:solidFill>
-                <a:latin typeface="Arial"/>
+                  <a:srgbClr val="232323"/>
+                </a:solidFill>
+                <a:latin typeface="Calibri"/>
               </a:rPr>
               <a:t>Walking With Farmers</a:t>
             </a:r>
@@ -5363,7 +5363,7 @@
             <a:r>
               <a:rPr sz="3800" b="1">
                 <a:solidFill>
-                  <a:srgbClr val="1F4D2B"/>
+                  <a:srgbClr val="232323"/>
                 </a:solidFill>
                 <a:latin typeface="Georgia"/>
               </a:rPr>
@@ -5387,7 +5387,7 @@
             <a:avLst/>
           </a:prstGeom>
           <a:solidFill>
-            <a:srgbClr val="E2D8C4"/>
+            <a:srgbClr val="6E9CC4"/>
           </a:solidFill>
           <a:ln>
             <a:noFill/>
@@ -5446,9 +5446,9 @@
             <a:r>
               <a:rPr sz="2800" b="0">
                 <a:solidFill>
-                  <a:srgbClr val="20190F"/>
-                </a:solidFill>
-                <a:latin typeface="Arial"/>
+                  <a:srgbClr val="232323"/>
+                </a:solidFill>
+                <a:latin typeface="Calibri"/>
               </a:rPr>
               <a:t>•  Baseline · establish · grow</a:t>
             </a:r>
@@ -5462,9 +5462,9 @@
             <a:r>
               <a:rPr sz="2800" b="0">
                 <a:solidFill>
-                  <a:srgbClr val="20190F"/>
-                </a:solidFill>
-                <a:latin typeface="Arial"/>
+                  <a:srgbClr val="232323"/>
+                </a:solidFill>
+                <a:latin typeface="Calibri"/>
               </a:rPr>
               <a:t>•  Harvest · sell · review</a:t>
             </a:r>
@@ -5486,11 +5486,11 @@
             <a:avLst/>
           </a:prstGeom>
           <a:solidFill>
-            <a:srgbClr val="FBF6EC"/>
+            <a:srgbClr val="FAF7F0"/>
           </a:solidFill>
           <a:ln w="15875">
             <a:solidFill>
-              <a:srgbClr val="E2D8C4"/>
+              <a:srgbClr val="6E9CC4"/>
             </a:solidFill>
           </a:ln>
           <a:effectLst/>
@@ -5547,9 +5547,9 @@
             <a:r>
               <a:rPr sz="1200" b="1">
                 <a:solidFill>
-                  <a:srgbClr val="C07A1E"/>
-                </a:solidFill>
-                <a:latin typeface="Arial"/>
+                  <a:srgbClr val="D9622B"/>
+                </a:solidFill>
+                <a:latin typeface="Calibri"/>
               </a:rPr>
               <a:t>POSTER ART · M-P13-ART · coming</a:t>
             </a:r>
@@ -5586,7 +5586,7 @@
             <a:r>
               <a:rPr sz="1800" b="1">
                 <a:solidFill>
-                  <a:srgbClr val="1F4D2B"/>
+                  <a:srgbClr val="232323"/>
                 </a:solidFill>
                 <a:latin typeface="Georgia"/>
               </a:rPr>
@@ -5625,9 +5625,9 @@
             <a:r>
               <a:rPr sz="1100" b="0">
                 <a:solidFill>
-                  <a:srgbClr val="20190F"/>
-                </a:solidFill>
-                <a:latin typeface="Arial"/>
+                  <a:srgbClr val="232323"/>
+                </a:solidFill>
+                <a:latin typeface="Calibri"/>
               </a:rPr>
               <a:t>A winding path across the poster through six "stops", each a small garden scene matching M-P08's stages, from bare ground (left) to harvest and seed jars (right). Along the path, small symbols show contact types: a single pair walking (individual visit), a circle of people under a tree (cluster visit), a phone (check-in), and at stops 4 and 6 a big…</a:t>
             </a:r>
@@ -5648,7 +5648,7 @@
     <p:bg>
       <p:bgPr>
         <a:solidFill>
-          <a:srgbClr val="F7F2E9"/>
+          <a:srgbClr val="FAF7F0"/>
         </a:solidFill>
         <a:effectLst/>
       </p:bgPr>
@@ -5690,9 +5690,9 @@
             <a:r>
               <a:rPr sz="1000" b="0">
                 <a:solidFill>
-                  <a:srgbClr val="6B6255"/>
-                </a:solidFill>
-                <a:latin typeface="Arial"/>
+                  <a:srgbClr val="232323"/>
+                </a:solidFill>
+                <a:latin typeface="Calibri"/>
               </a:rPr>
               <a:t>M-D3-11   ·   Poster M-P13</a:t>
             </a:r>
@@ -5729,9 +5729,9 @@
             <a:r>
               <a:rPr sz="1000" b="0">
                 <a:solidFill>
-                  <a:srgbClr val="6B6255"/>
-                </a:solidFill>
-                <a:latin typeface="Arial"/>
+                  <a:srgbClr val="232323"/>
+                </a:solidFill>
+                <a:latin typeface="Calibri"/>
               </a:rPr>
               <a:t>Walking With Farmers</a:t>
             </a:r>
@@ -5753,7 +5753,7 @@
             <a:avLst/>
           </a:prstGeom>
           <a:solidFill>
-            <a:srgbClr val="C07A1E"/>
+            <a:srgbClr val="D9622B"/>
           </a:solidFill>
           <a:ln>
             <a:noFill/>
@@ -5812,9 +5812,9 @@
             <a:r>
               <a:rPr sz="1400" b="1">
                 <a:solidFill>
-                  <a:srgbClr val="F7F2E9"/>
-                </a:solidFill>
-                <a:latin typeface="Arial"/>
+                  <a:srgbClr val="FAF7F0"/>
+                </a:solidFill>
+                <a:latin typeface="Calibri"/>
               </a:rPr>
               <a:t>YOUR TURN</a:t>
             </a:r>
@@ -5851,7 +5851,7 @@
             <a:r>
               <a:rPr sz="3800" b="1">
                 <a:solidFill>
-                  <a:srgbClr val="1F4D2B"/>
+                  <a:srgbClr val="232323"/>
                 </a:solidFill>
                 <a:latin typeface="Georgia"/>
               </a:rPr>
@@ -5875,7 +5875,7 @@
             <a:avLst/>
           </a:prstGeom>
           <a:solidFill>
-            <a:srgbClr val="E2D8C4"/>
+            <a:srgbClr val="6E9CC4"/>
           </a:solidFill>
           <a:ln>
             <a:noFill/>
@@ -5934,9 +5934,9 @@
             <a:r>
               <a:rPr sz="3000" b="1">
                 <a:solidFill>
-                  <a:srgbClr val="20190F"/>
-                </a:solidFill>
-                <a:latin typeface="Arial"/>
+                  <a:srgbClr val="232323"/>
+                </a:solidFill>
+                <a:latin typeface="Calibri"/>
               </a:rPr>
               <a:t>•  Add your cluster visit to its month</a:t>
             </a:r>
@@ -5950,9 +5950,9 @@
             <a:r>
               <a:rPr sz="3000" b="1">
                 <a:solidFill>
-                  <a:srgbClr val="20190F"/>
-                </a:solidFill>
-                <a:latin typeface="Arial"/>
+                  <a:srgbClr val="232323"/>
+                </a:solidFill>
+                <a:latin typeface="Calibri"/>
               </a:rPr>
               <a:t>•  Mark your field days</a:t>
             </a:r>
@@ -5973,7 +5973,7 @@
     <p:bg>
       <p:bgPr>
         <a:solidFill>
-          <a:srgbClr val="F7F2E9"/>
+          <a:srgbClr val="FAF7F0"/>
         </a:solidFill>
         <a:effectLst/>
       </p:bgPr>
@@ -6015,9 +6015,9 @@
             <a:r>
               <a:rPr sz="1000" b="0">
                 <a:solidFill>
-                  <a:srgbClr val="6B6255"/>
-                </a:solidFill>
-                <a:latin typeface="Arial"/>
+                  <a:srgbClr val="232323"/>
+                </a:solidFill>
+                <a:latin typeface="Calibri"/>
               </a:rPr>
               <a:t>M-D3-12   ·   Poster M-P14</a:t>
             </a:r>
@@ -6054,9 +6054,9 @@
             <a:r>
               <a:rPr sz="1000" b="0">
                 <a:solidFill>
-                  <a:srgbClr val="6B6255"/>
-                </a:solidFill>
-                <a:latin typeface="Arial"/>
+                  <a:srgbClr val="232323"/>
+                </a:solidFill>
+                <a:latin typeface="Calibri"/>
               </a:rPr>
               <a:t>Walking With Farmers</a:t>
             </a:r>
@@ -6093,7 +6093,7 @@
             <a:r>
               <a:rPr sz="3800" b="1">
                 <a:solidFill>
-                  <a:srgbClr val="1F4D2B"/>
+                  <a:srgbClr val="232323"/>
                 </a:solidFill>
                 <a:latin typeface="Georgia"/>
               </a:rPr>
@@ -6117,7 +6117,7 @@
             <a:avLst/>
           </a:prstGeom>
           <a:solidFill>
-            <a:srgbClr val="E2D8C4"/>
+            <a:srgbClr val="6E9CC4"/>
           </a:solidFill>
           <a:ln>
             <a:noFill/>
@@ -6176,9 +6176,9 @@
             <a:r>
               <a:rPr sz="2400" b="0">
                 <a:solidFill>
-                  <a:srgbClr val="20190F"/>
-                </a:solidFill>
-                <a:latin typeface="Arial"/>
+                  <a:srgbClr val="232323"/>
+                </a:solidFill>
+                <a:latin typeface="Calibri"/>
               </a:rPr>
               <a:t>•  Phone or paper: same records</a:t>
             </a:r>
@@ -6192,9 +6192,9 @@
             <a:r>
               <a:rPr sz="2400" b="0">
                 <a:solidFill>
-                  <a:srgbClr val="20190F"/>
-                </a:solidFill>
-                <a:latin typeface="Arial"/>
+                  <a:srgbClr val="232323"/>
+                </a:solidFill>
+                <a:latin typeface="Calibri"/>
               </a:rPr>
               <a:t>•  One exercise per visit, 10–15 min</a:t>
             </a:r>
@@ -6208,9 +6208,9 @@
             <a:r>
               <a:rPr sz="2400" b="0">
                 <a:solidFill>
-                  <a:srgbClr val="20190F"/>
-                </a:solidFill>
-                <a:latin typeface="Arial"/>
+                  <a:srgbClr val="232323"/>
+                </a:solidFill>
+                <a:latin typeface="Calibri"/>
               </a:rPr>
               <a:t>•  The farmer's hands</a:t>
             </a:r>
@@ -6232,11 +6232,11 @@
             <a:avLst/>
           </a:prstGeom>
           <a:solidFill>
-            <a:srgbClr val="FBF6EC"/>
+            <a:srgbClr val="FAF7F0"/>
           </a:solidFill>
           <a:ln w="15875">
             <a:solidFill>
-              <a:srgbClr val="E2D8C4"/>
+              <a:srgbClr val="6E9CC4"/>
             </a:solidFill>
           </a:ln>
           <a:effectLst/>
@@ -6293,9 +6293,9 @@
             <a:r>
               <a:rPr sz="1200" b="1">
                 <a:solidFill>
-                  <a:srgbClr val="C07A1E"/>
-                </a:solidFill>
-                <a:latin typeface="Arial"/>
+                  <a:srgbClr val="D9622B"/>
+                </a:solidFill>
+                <a:latin typeface="Calibri"/>
               </a:rPr>
               <a:t>POSTER ART · M-P14-ART · coming</a:t>
             </a:r>
@@ -6332,7 +6332,7 @@
             <a:r>
               <a:rPr sz="1800" b="1">
                 <a:solidFill>
-                  <a:srgbClr val="1F4D2B"/>
+                  <a:srgbClr val="232323"/>
                 </a:solidFill>
                 <a:latin typeface="Georgia"/>
               </a:rPr>
@@ -6371,9 +6371,9 @@
             <a:r>
               <a:rPr sz="1100" b="0">
                 <a:solidFill>
-                  <a:srgbClr val="20190F"/>
-                </a:solidFill>
-                <a:latin typeface="Arial"/>
+                  <a:srgbClr val="232323"/>
+                </a:solidFill>
+                <a:latin typeface="Calibri"/>
               </a:rPr>
               <a:t>A path that splits around a tree into two lanes and joins again. Left lane: the youth holds a smartphone (screen blank), showing it to the gogo farmer. Right lane: the gogo writes in an exercise book with a pencil; an envelope of slips and a carbon invoice book beside her. Both lanes pass the same four objects: a hanging scale with a bunch of spinach, a…</a:t>
             </a:r>
@@ -6394,7 +6394,7 @@
     <p:bg>
       <p:bgPr>
         <a:solidFill>
-          <a:srgbClr val="F7F2E9"/>
+          <a:srgbClr val="FAF7F0"/>
         </a:solidFill>
         <a:effectLst/>
       </p:bgPr>
@@ -6436,9 +6436,9 @@
             <a:r>
               <a:rPr sz="1000" b="0">
                 <a:solidFill>
-                  <a:srgbClr val="6B6255"/>
-                </a:solidFill>
-                <a:latin typeface="Arial"/>
+                  <a:srgbClr val="232323"/>
+                </a:solidFill>
+                <a:latin typeface="Calibri"/>
               </a:rPr>
               <a:t>M-D3-13   ·   Poster M-P14</a:t>
             </a:r>
@@ -6475,9 +6475,9 @@
             <a:r>
               <a:rPr sz="1000" b="0">
                 <a:solidFill>
-                  <a:srgbClr val="6B6255"/>
-                </a:solidFill>
-                <a:latin typeface="Arial"/>
+                  <a:srgbClr val="232323"/>
+                </a:solidFill>
+                <a:latin typeface="Calibri"/>
               </a:rPr>
               <a:t>Walking With Farmers</a:t>
             </a:r>
@@ -6499,7 +6499,7 @@
             <a:avLst/>
           </a:prstGeom>
           <a:solidFill>
-            <a:srgbClr val="235E86"/>
+            <a:srgbClr val="6E9CC4"/>
           </a:solidFill>
           <a:ln>
             <a:noFill/>
@@ -6558,9 +6558,9 @@
             <a:r>
               <a:rPr sz="1200" b="1">
                 <a:solidFill>
-                  <a:srgbClr val="F7F2E9"/>
-                </a:solidFill>
-                <a:latin typeface="Arial"/>
+                  <a:srgbClr val="FAF7F0"/>
+                </a:solidFill>
+                <a:latin typeface="Calibri"/>
               </a:rPr>
               <a:t>APP</a:t>
             </a:r>
@@ -6597,7 +6597,7 @@
             <a:r>
               <a:rPr sz="3800" b="1">
                 <a:solidFill>
-                  <a:srgbClr val="1F4D2B"/>
+                  <a:srgbClr val="232323"/>
                 </a:solidFill>
                 <a:latin typeface="Georgia"/>
               </a:rPr>
@@ -6621,7 +6621,7 @@
             <a:avLst/>
           </a:prstGeom>
           <a:solidFill>
-            <a:srgbClr val="E2D8C4"/>
+            <a:srgbClr val="6E9CC4"/>
           </a:solidFill>
           <a:ln>
             <a:noFill/>
@@ -6680,9 +6680,9 @@
             <a:r>
               <a:rPr sz="2400" b="0">
                 <a:solidFill>
-                  <a:srgbClr val="20190F"/>
-                </a:solidFill>
-                <a:latin typeface="Arial"/>
+                  <a:srgbClr val="232323"/>
+                </a:solidFill>
+                <a:latin typeface="Calibri"/>
               </a:rPr>
               <a:t>•  Weigh → Picked (kg)</a:t>
             </a:r>
@@ -6696,9 +6696,9 @@
             <a:r>
               <a:rPr sz="2400" b="0">
                 <a:solidFill>
-                  <a:srgbClr val="20190F"/>
-                </a:solidFill>
-                <a:latin typeface="Arial"/>
+                  <a:srgbClr val="232323"/>
+                </a:solidFill>
+                <a:latin typeface="Calibri"/>
               </a:rPr>
               <a:t>•  Sold and Spent · check before adding</a:t>
             </a:r>
@@ -6712,9 +6712,9 @@
             <a:r>
               <a:rPr sz="2400" b="0">
                 <a:solidFill>
-                  <a:srgbClr val="20190F"/>
-                </a:solidFill>
-                <a:latin typeface="Arial"/>
+                  <a:srgbClr val="232323"/>
+                </a:solidFill>
+                <a:latin typeface="Calibri"/>
               </a:rPr>
               <a:t>•  Till slip: Lima reads, you check</a:t>
             </a:r>
@@ -6736,11 +6736,11 @@
             <a:avLst/>
           </a:prstGeom>
           <a:solidFill>
-            <a:srgbClr val="FBF6EC"/>
+            <a:srgbClr val="FAF7F0"/>
           </a:solidFill>
           <a:ln w="15875">
             <a:solidFill>
-              <a:srgbClr val="E2D8C4"/>
+              <a:srgbClr val="6E9CC4"/>
             </a:solidFill>
           </a:ln>
           <a:effectLst/>
@@ -6797,9 +6797,9 @@
             <a:r>
               <a:rPr sz="1200" b="1">
                 <a:solidFill>
-                  <a:srgbClr val="C07A1E"/>
-                </a:solidFill>
-                <a:latin typeface="Arial"/>
+                  <a:srgbClr val="D9622B"/>
+                </a:solidFill>
+                <a:latin typeface="Calibri"/>
               </a:rPr>
               <a:t>IMAGE · M-IMG-08 · coming</a:t>
             </a:r>
@@ -6836,7 +6836,7 @@
             <a:r>
               <a:rPr sz="1800" b="1">
                 <a:solidFill>
-                  <a:srgbClr val="1F4D2B"/>
+                  <a:srgbClr val="232323"/>
                 </a:solidFill>
                 <a:latin typeface="Georgia"/>
               </a:rPr>
@@ -6875,9 +6875,9 @@
             <a:r>
               <a:rPr sz="1100" b="0">
                 <a:solidFill>
-                  <a:srgbClr val="20190F"/>
-                </a:solidFill>
-                <a:latin typeface="Arial"/>
+                  <a:srgbClr val="232323"/>
+                </a:solidFill>
+                <a:latin typeface="Calibri"/>
               </a:rPr>
               <a:t>Close view: the gogo hangs a bunch of spinach on a hand-held hanging scale; the youth beside her holds a phone (blank screen) and she holds an exercise book open (blank ruled lines). 16:9.</a:t>
             </a:r>
@@ -6898,7 +6898,7 @@
     <p:bg>
       <p:bgPr>
         <a:solidFill>
-          <a:srgbClr val="F7F2E9"/>
+          <a:srgbClr val="FAF7F0"/>
         </a:solidFill>
         <a:effectLst/>
       </p:bgPr>
@@ -6940,9 +6940,9 @@
             <a:r>
               <a:rPr sz="1000" b="0">
                 <a:solidFill>
-                  <a:srgbClr val="6B6255"/>
-                </a:solidFill>
-                <a:latin typeface="Arial"/>
+                  <a:srgbClr val="232323"/>
+                </a:solidFill>
+                <a:latin typeface="Calibri"/>
               </a:rPr>
               <a:t>M-D3-14   ·   Poster F-P20</a:t>
             </a:r>
@@ -6979,9 +6979,9 @@
             <a:r>
               <a:rPr sz="1000" b="0">
                 <a:solidFill>
-                  <a:srgbClr val="6B6255"/>
-                </a:solidFill>
-                <a:latin typeface="Arial"/>
+                  <a:srgbClr val="232323"/>
+                </a:solidFill>
+                <a:latin typeface="Calibri"/>
               </a:rPr>
               <a:t>Walking With Farmers</a:t>
             </a:r>
@@ -7018,7 +7018,7 @@
             <a:r>
               <a:rPr sz="3800" b="1">
                 <a:solidFill>
-                  <a:srgbClr val="1F4D2B"/>
+                  <a:srgbClr val="232323"/>
                 </a:solidFill>
                 <a:latin typeface="Georgia"/>
               </a:rPr>
@@ -7042,7 +7042,7 @@
             <a:avLst/>
           </a:prstGeom>
           <a:solidFill>
-            <a:srgbClr val="E2D8C4"/>
+            <a:srgbClr val="6E9CC4"/>
           </a:solidFill>
           <a:ln>
             <a:noFill/>
@@ -7101,9 +7101,9 @@
             <a:r>
               <a:rPr sz="2400" b="0">
                 <a:solidFill>
-                  <a:srgbClr val="20190F"/>
-                </a:solidFill>
-                <a:latin typeface="Arial"/>
+                  <a:srgbClr val="232323"/>
+                </a:solidFill>
+                <a:latin typeface="Calibri"/>
               </a:rPr>
               <a:t>•  Date · crop · kg · where it went</a:t>
             </a:r>
@@ -7117,9 +7117,9 @@
             <a:r>
               <a:rPr sz="2400" b="0">
                 <a:solidFill>
-                  <a:srgbClr val="20190F"/>
-                </a:solidFill>
-                <a:latin typeface="Arial"/>
+                  <a:srgbClr val="232323"/>
+                </a:solidFill>
+                <a:latin typeface="Calibri"/>
               </a:rPr>
               <a:t>•  Money in · money out · slip number</a:t>
             </a:r>
@@ -7141,11 +7141,11 @@
             <a:avLst/>
           </a:prstGeom>
           <a:solidFill>
-            <a:srgbClr val="FBF6EC"/>
+            <a:srgbClr val="FAF7F0"/>
           </a:solidFill>
           <a:ln w="15875">
             <a:solidFill>
-              <a:srgbClr val="E2D8C4"/>
+              <a:srgbClr val="6E9CC4"/>
             </a:solidFill>
           </a:ln>
           <a:effectLst/>
@@ -7202,9 +7202,9 @@
             <a:r>
               <a:rPr sz="1200" b="1">
                 <a:solidFill>
-                  <a:srgbClr val="C07A1E"/>
-                </a:solidFill>
-                <a:latin typeface="Arial"/>
+                  <a:srgbClr val="D9622B"/>
+                </a:solidFill>
+                <a:latin typeface="Calibri"/>
               </a:rPr>
               <a:t>IMAGE · M-IMG-08 · coming</a:t>
             </a:r>
@@ -7241,7 +7241,7 @@
             <a:r>
               <a:rPr sz="1800" b="1">
                 <a:solidFill>
-                  <a:srgbClr val="1F4D2B"/>
+                  <a:srgbClr val="232323"/>
                 </a:solidFill>
                 <a:latin typeface="Georgia"/>
               </a:rPr>
@@ -7280,9 +7280,9 @@
             <a:r>
               <a:rPr sz="1100" b="0">
                 <a:solidFill>
-                  <a:srgbClr val="20190F"/>
-                </a:solidFill>
-                <a:latin typeface="Arial"/>
+                  <a:srgbClr val="232323"/>
+                </a:solidFill>
+                <a:latin typeface="Calibri"/>
               </a:rPr>
               <a:t>Close view: the gogo hangs a bunch of spinach on a hand-held hanging scale; the youth beside her holds a phone (blank screen) and she holds an exercise book open (blank ruled lines). 16:9.</a:t>
             </a:r>
@@ -7303,7 +7303,7 @@
     <p:bg>
       <p:bgPr>
         <a:solidFill>
-          <a:srgbClr val="F7F2E9"/>
+          <a:srgbClr val="FAF7F0"/>
         </a:solidFill>
         <a:effectLst/>
       </p:bgPr>
@@ -7345,9 +7345,9 @@
             <a:r>
               <a:rPr sz="1000" b="0">
                 <a:solidFill>
-                  <a:srgbClr val="6B6255"/>
-                </a:solidFill>
-                <a:latin typeface="Arial"/>
+                  <a:srgbClr val="232323"/>
+                </a:solidFill>
+                <a:latin typeface="Calibri"/>
               </a:rPr>
               <a:t>M-D3-15   ·   Poster M-P14</a:t>
             </a:r>
@@ -7384,9 +7384,9 @@
             <a:r>
               <a:rPr sz="1000" b="0">
                 <a:solidFill>
-                  <a:srgbClr val="6B6255"/>
-                </a:solidFill>
-                <a:latin typeface="Arial"/>
+                  <a:srgbClr val="232323"/>
+                </a:solidFill>
+                <a:latin typeface="Calibri"/>
               </a:rPr>
               <a:t>Walking With Farmers</a:t>
             </a:r>
@@ -7423,7 +7423,7 @@
             <a:r>
               <a:rPr sz="3800" b="1">
                 <a:solidFill>
-                  <a:srgbClr val="1F4D2B"/>
+                  <a:srgbClr val="232323"/>
                 </a:solidFill>
                 <a:latin typeface="Georgia"/>
               </a:rPr>
@@ -7447,7 +7447,7 @@
             <a:avLst/>
           </a:prstGeom>
           <a:solidFill>
-            <a:srgbClr val="E2D8C4"/>
+            <a:srgbClr val="6E9CC4"/>
           </a:solidFill>
           <a:ln>
             <a:noFill/>
@@ -7506,9 +7506,9 @@
             <a:r>
               <a:rPr sz="2400" b="0">
                 <a:solidFill>
-                  <a:srgbClr val="20190F"/>
-                </a:solidFill>
-                <a:latin typeface="Arial"/>
+                  <a:srgbClr val="232323"/>
+                </a:solidFill>
+                <a:latin typeface="Calibri"/>
               </a:rPr>
               <a:t>•  App: Invoice builder · Saved · Share PDF</a:t>
             </a:r>
@@ -7522,9 +7522,9 @@
             <a:r>
               <a:rPr sz="2400" b="0">
                 <a:solidFill>
-                  <a:srgbClr val="20190F"/>
-                </a:solidFill>
-                <a:latin typeface="Arial"/>
+                  <a:srgbClr val="232323"/>
+                </a:solidFill>
+                <a:latin typeface="Calibri"/>
               </a:rPr>
               <a:t>•  Paper: duplicate book · copy stays</a:t>
             </a:r>
@@ -7538,9 +7538,9 @@
             <a:r>
               <a:rPr sz="2400" b="0">
                 <a:solidFill>
-                  <a:srgbClr val="20190F"/>
-                </a:solidFill>
-                <a:latin typeface="Arial"/>
+                  <a:srgbClr val="232323"/>
+                </a:solidFill>
+                <a:latin typeface="Calibri"/>
               </a:rPr>
               <a:t>•  An invoice is not a payment</a:t>
             </a:r>
@@ -7562,11 +7562,11 @@
             <a:avLst/>
           </a:prstGeom>
           <a:solidFill>
-            <a:srgbClr val="FBF6EC"/>
+            <a:srgbClr val="FAF7F0"/>
           </a:solidFill>
           <a:ln w="15875">
             <a:solidFill>
-              <a:srgbClr val="E2D8C4"/>
+              <a:srgbClr val="6E9CC4"/>
             </a:solidFill>
           </a:ln>
           <a:effectLst/>
@@ -7623,9 +7623,9 @@
             <a:r>
               <a:rPr sz="1200" b="1">
                 <a:solidFill>
-                  <a:srgbClr val="C07A1E"/>
-                </a:solidFill>
-                <a:latin typeface="Arial"/>
+                  <a:srgbClr val="D9622B"/>
+                </a:solidFill>
+                <a:latin typeface="Calibri"/>
               </a:rPr>
               <a:t>IMAGE · M-IMG-09 · coming</a:t>
             </a:r>
@@ -7662,7 +7662,7 @@
             <a:r>
               <a:rPr sz="1800" b="1">
                 <a:solidFill>
-                  <a:srgbClr val="1F4D2B"/>
+                  <a:srgbClr val="232323"/>
                 </a:solidFill>
                 <a:latin typeface="Georgia"/>
               </a:rPr>
@@ -7701,9 +7701,9 @@
             <a:r>
               <a:rPr sz="1100" b="0">
                 <a:solidFill>
-                  <a:srgbClr val="20190F"/>
-                </a:solidFill>
-                <a:latin typeface="Arial"/>
+                  <a:srgbClr val="232323"/>
+                </a:solidFill>
+                <a:latin typeface="Calibri"/>
               </a:rPr>
               <a:t>At a spaza counter (shelves of generic tins and bags, no brands), a farmer hands a bundle of bunches and a paper invoice (blank lines) to the shop owner; a carbon invoice book lies open on the counter. 16:9.</a:t>
             </a:r>
@@ -7724,7 +7724,7 @@
     <p:bg>
       <p:bgPr>
         <a:solidFill>
-          <a:srgbClr val="F7F2E9"/>
+          <a:srgbClr val="FAF7F0"/>
         </a:solidFill>
         <a:effectLst/>
       </p:bgPr>
@@ -7766,9 +7766,9 @@
             <a:r>
               <a:rPr sz="1000" b="0">
                 <a:solidFill>
-                  <a:srgbClr val="6B6255"/>
-                </a:solidFill>
-                <a:latin typeface="Arial"/>
+                  <a:srgbClr val="232323"/>
+                </a:solidFill>
+                <a:latin typeface="Calibri"/>
               </a:rPr>
               <a:t>M-D3-16   ·   Poster M-P15</a:t>
             </a:r>
@@ -7805,9 +7805,9 @@
             <a:r>
               <a:rPr sz="1000" b="0">
                 <a:solidFill>
-                  <a:srgbClr val="6B6255"/>
-                </a:solidFill>
-                <a:latin typeface="Arial"/>
+                  <a:srgbClr val="232323"/>
+                </a:solidFill>
+                <a:latin typeface="Calibri"/>
               </a:rPr>
               <a:t>Walking With Farmers</a:t>
             </a:r>
@@ -7844,7 +7844,7 @@
             <a:r>
               <a:rPr sz="3800" b="1">
                 <a:solidFill>
-                  <a:srgbClr val="1F4D2B"/>
+                  <a:srgbClr val="232323"/>
                 </a:solidFill>
                 <a:latin typeface="Georgia"/>
               </a:rPr>
@@ -7868,7 +7868,7 @@
             <a:avLst/>
           </a:prstGeom>
           <a:solidFill>
-            <a:srgbClr val="E2D8C4"/>
+            <a:srgbClr val="6E9CC4"/>
           </a:solidFill>
           <a:ln>
             <a:noFill/>
@@ -7927,9 +7927,9 @@
             <a:r>
               <a:rPr sz="2800" b="0">
                 <a:solidFill>
-                  <a:srgbClr val="20190F"/>
-                </a:solidFill>
-                <a:latin typeface="Arial"/>
+                  <a:srgbClr val="232323"/>
+                </a:solidFill>
+                <a:latin typeface="Calibri"/>
               </a:rPr>
               <a:t>•  Stay calm · Listen</a:t>
             </a:r>
@@ -7943,9 +7943,9 @@
             <a:r>
               <a:rPr sz="2800" b="0">
                 <a:solidFill>
-                  <a:srgbClr val="20190F"/>
-                </a:solidFill>
-                <a:latin typeface="Arial"/>
+                  <a:srgbClr val="232323"/>
+                </a:solidFill>
+                <a:latin typeface="Calibri"/>
               </a:rPr>
               <a:t>•  What can they do?</a:t>
             </a:r>
@@ -7959,9 +7959,9 @@
             <a:r>
               <a:rPr sz="2800" b="0">
                 <a:solidFill>
-                  <a:srgbClr val="20190F"/>
-                </a:solidFill>
-                <a:latin typeface="Arial"/>
+                  <a:srgbClr val="232323"/>
+                </a:solidFill>
+                <a:latin typeface="Calibri"/>
               </a:rPr>
               <a:t>•  Who else can help?</a:t>
             </a:r>
@@ -7983,11 +7983,11 @@
             <a:avLst/>
           </a:prstGeom>
           <a:solidFill>
-            <a:srgbClr val="FBF6EC"/>
+            <a:srgbClr val="FAF7F0"/>
           </a:solidFill>
           <a:ln w="15875">
             <a:solidFill>
-              <a:srgbClr val="E2D8C4"/>
+              <a:srgbClr val="6E9CC4"/>
             </a:solidFill>
           </a:ln>
           <a:effectLst/>
@@ -8044,9 +8044,9 @@
             <a:r>
               <a:rPr sz="1200" b="1">
                 <a:solidFill>
-                  <a:srgbClr val="C07A1E"/>
-                </a:solidFill>
-                <a:latin typeface="Arial"/>
+                  <a:srgbClr val="D9622B"/>
+                </a:solidFill>
+                <a:latin typeface="Calibri"/>
               </a:rPr>
               <a:t>POSTER ART · M-P15-ART · coming</a:t>
             </a:r>
@@ -8083,7 +8083,7 @@
             <a:r>
               <a:rPr sz="1800" b="1">
                 <a:solidFill>
-                  <a:srgbClr val="1F4D2B"/>
+                  <a:srgbClr val="232323"/>
                 </a:solidFill>
                 <a:latin typeface="Georgia"/>
               </a:rPr>
@@ -8122,9 +8122,9 @@
             <a:r>
               <a:rPr sz="1100" b="0">
                 <a:solidFill>
-                  <a:srgbClr val="20190F"/>
-                </a:solidFill>
-                <a:latin typeface="Arial"/>
+                  <a:srgbClr val="232323"/>
+                </a:solidFill>
+                <a:latin typeface="Calibri"/>
               </a:rPr>
               <a:t>A dry garden with wilting plants and an empty drum. The farmer sits on the ground, head in hands. Four steps shown as footprints leading to him: the mentor breathing calmly; the mentor sitting beside him listening; the farmer standing, pointing at one small bed he can save; a small group of neighbours arriving with a wheelbarrow of grass mulch. No clinic…</a:t>
             </a:r>
@@ -8145,7 +8145,7 @@
     <p:bg>
       <p:bgPr>
         <a:solidFill>
-          <a:srgbClr val="F7F2E9"/>
+          <a:srgbClr val="FAF7F0"/>
         </a:solidFill>
         <a:effectLst/>
       </p:bgPr>
@@ -8187,9 +8187,9 @@
             <a:r>
               <a:rPr sz="1000" b="0">
                 <a:solidFill>
-                  <a:srgbClr val="6B6255"/>
-                </a:solidFill>
-                <a:latin typeface="Arial"/>
+                  <a:srgbClr val="232323"/>
+                </a:solidFill>
+                <a:latin typeface="Calibri"/>
               </a:rPr>
               <a:t>M-D3-17   ·   Poster M-P13</a:t>
             </a:r>
@@ -8226,9 +8226,9 @@
             <a:r>
               <a:rPr sz="1000" b="0">
                 <a:solidFill>
-                  <a:srgbClr val="6B6255"/>
-                </a:solidFill>
-                <a:latin typeface="Arial"/>
+                  <a:srgbClr val="232323"/>
+                </a:solidFill>
+                <a:latin typeface="Calibri"/>
               </a:rPr>
               <a:t>Walking With Farmers</a:t>
             </a:r>
@@ -8250,7 +8250,7 @@
             <a:avLst/>
           </a:prstGeom>
           <a:solidFill>
-            <a:srgbClr val="C07A1E"/>
+            <a:srgbClr val="D9622B"/>
           </a:solidFill>
           <a:ln>
             <a:noFill/>
@@ -8309,9 +8309,9 @@
             <a:r>
               <a:rPr sz="1400" b="1">
                 <a:solidFill>
-                  <a:srgbClr val="F7F2E9"/>
-                </a:solidFill>
-                <a:latin typeface="Arial"/>
+                  <a:srgbClr val="FAF7F0"/>
+                </a:solidFill>
+                <a:latin typeface="Calibri"/>
               </a:rPr>
               <a:t>YOUR TURN</a:t>
             </a:r>
@@ -8348,7 +8348,7 @@
             <a:r>
               <a:rPr sz="3800" b="1">
                 <a:solidFill>
-                  <a:srgbClr val="1F4D2B"/>
+                  <a:srgbClr val="232323"/>
                 </a:solidFill>
                 <a:latin typeface="Georgia"/>
               </a:rPr>
@@ -8372,7 +8372,7 @@
             <a:avLst/>
           </a:prstGeom>
           <a:solidFill>
-            <a:srgbClr val="E2D8C4"/>
+            <a:srgbClr val="6E9CC4"/>
           </a:solidFill>
           <a:ln>
             <a:noFill/>
@@ -8431,9 +8431,9 @@
             <a:r>
               <a:rPr sz="3000" b="1">
                 <a:solidFill>
-                  <a:srgbClr val="20190F"/>
-                </a:solidFill>
-                <a:latin typeface="Arial"/>
+                  <a:srgbClr val="232323"/>
+                </a:solidFill>
+                <a:latin typeface="Calibri"/>
               </a:rPr>
               <a:t>•  Plan month 1 and week 1</a:t>
             </a:r>
@@ -8447,9 +8447,9 @@
             <a:r>
               <a:rPr sz="3000" b="1">
                 <a:solidFill>
-                  <a:srgbClr val="20190F"/>
-                </a:solidFill>
-                <a:latin typeface="Arial"/>
+                  <a:srgbClr val="232323"/>
+                </a:solidFill>
+                <a:latin typeface="Calibri"/>
               </a:rPr>
               <a:t>•  Swap numbers with a buddy</a:t>
             </a:r>
@@ -8463,9 +8463,9 @@
             <a:r>
               <a:rPr sz="3000" b="1">
                 <a:solidFill>
-                  <a:srgbClr val="20190F"/>
-                </a:solidFill>
-                <a:latin typeface="Arial"/>
+                  <a:srgbClr val="232323"/>
+                </a:solidFill>
+                <a:latin typeface="Calibri"/>
               </a:rPr>
               <a:t>•  One observed visit in month 1</a:t>
             </a:r>
@@ -8486,7 +8486,7 @@
     <p:bg>
       <p:bgPr>
         <a:solidFill>
-          <a:srgbClr val="1F4D2B"/>
+          <a:srgbClr val="2E3440"/>
         </a:solidFill>
         <a:effectLst/>
       </p:bgPr>
@@ -8528,9 +8528,9 @@
             <a:r>
               <a:rPr sz="1000" b="0">
                 <a:solidFill>
-                  <a:srgbClr val="A8D88A"/>
-                </a:solidFill>
-                <a:latin typeface="Arial"/>
+                  <a:srgbClr val="FAF7F0"/>
+                </a:solidFill>
+                <a:latin typeface="Calibri"/>
               </a:rPr>
               <a:t>M-D3-18</a:t>
             </a:r>
@@ -8567,9 +8567,9 @@
             <a:r>
               <a:rPr sz="1000" b="0">
                 <a:solidFill>
-                  <a:srgbClr val="A8D88A"/>
-                </a:solidFill>
-                <a:latin typeface="Arial"/>
+                  <a:srgbClr val="FAF7F0"/>
+                </a:solidFill>
+                <a:latin typeface="Calibri"/>
               </a:rPr>
               <a:t>Walking With Farmers</a:t>
             </a:r>
@@ -8606,7 +8606,7 @@
             <a:r>
               <a:rPr sz="4800" b="1">
                 <a:solidFill>
-                  <a:srgbClr val="F7F2E9"/>
+                  <a:srgbClr val="FAF7F0"/>
                 </a:solidFill>
                 <a:latin typeface="Georgia"/>
               </a:rPr>
@@ -8630,7 +8630,7 @@
             <a:avLst/>
           </a:prstGeom>
           <a:solidFill>
-            <a:srgbClr val="C07A1E"/>
+            <a:srgbClr val="D9622B"/>
           </a:solidFill>
           <a:ln>
             <a:noFill/>
@@ -8689,9 +8689,9 @@
             <a:r>
               <a:rPr sz="2400" b="0">
                 <a:solidFill>
-                  <a:srgbClr val="A8D88A"/>
-                </a:solidFill>
-                <a:latin typeface="Arial"/>
+                  <a:srgbClr val="FAF7F0"/>
+                </a:solidFill>
+                <a:latin typeface="Calibri"/>
               </a:rPr>
               <a:t>Walk beside your farmers</a:t>
             </a:r>
@@ -8705,9 +8705,9 @@
             <a:r>
               <a:rPr sz="2400" b="0">
                 <a:solidFill>
-                  <a:srgbClr val="A8D88A"/>
-                </a:solidFill>
-                <a:latin typeface="Arial"/>
+                  <a:srgbClr val="FAF7F0"/>
+                </a:solidFill>
+                <a:latin typeface="Calibri"/>
               </a:rPr>
               <a:t>Evaluation · certificates</a:t>
             </a:r>
@@ -8729,11 +8729,11 @@
             <a:avLst/>
           </a:prstGeom>
           <a:solidFill>
-            <a:srgbClr val="FBF6EC"/>
+            <a:srgbClr val="FAF7F0"/>
           </a:solidFill>
           <a:ln w="15875">
             <a:solidFill>
-              <a:srgbClr val="E2D8C4"/>
+              <a:srgbClr val="6E9CC4"/>
             </a:solidFill>
           </a:ln>
           <a:effectLst/>
@@ -8790,9 +8790,9 @@
             <a:r>
               <a:rPr sz="1200" b="1">
                 <a:solidFill>
-                  <a:srgbClr val="C07A1E"/>
-                </a:solidFill>
-                <a:latin typeface="Arial"/>
+                  <a:srgbClr val="D9622B"/>
+                </a:solidFill>
+                <a:latin typeface="Calibri"/>
               </a:rPr>
               <a:t>IMAGE · M-IMG-01 · coming</a:t>
             </a:r>
@@ -8829,7 +8829,7 @@
             <a:r>
               <a:rPr sz="1800" b="1">
                 <a:solidFill>
-                  <a:srgbClr val="1F4D2B"/>
+                  <a:srgbClr val="232323"/>
                 </a:solidFill>
                 <a:latin typeface="Georgia"/>
               </a:rPr>
@@ -8868,9 +8868,9 @@
             <a:r>
               <a:rPr sz="1100" b="0">
                 <a:solidFill>
-                  <a:srgbClr val="20190F"/>
-                </a:solidFill>
-                <a:latin typeface="Arial"/>
+                  <a:srgbClr val="232323"/>
+                </a:solidFill>
+                <a:latin typeface="Calibri"/>
               </a:rPr>
               <a:t>Cover image for all decks. Early morning; the mentor greets the farmer at a wire-and- dropper garden gate, both smiling, a vegetable garden behind with mulched beds and a JoJo-style tank beside a corrugated-iron roof. Sun low in the north-east, long shadows falling south-west. 16:9, 1920 × 1080, space on the left third for the slide title.</a:t>
             </a:r>
@@ -8891,7 +8891,7 @@
     <p:bg>
       <p:bgPr>
         <a:solidFill>
-          <a:srgbClr val="F7F2E9"/>
+          <a:srgbClr val="FAF7F0"/>
         </a:solidFill>
         <a:effectLst/>
       </p:bgPr>
@@ -8933,9 +8933,9 @@
             <a:r>
               <a:rPr sz="1000" b="0">
                 <a:solidFill>
-                  <a:srgbClr val="6B6255"/>
-                </a:solidFill>
-                <a:latin typeface="Arial"/>
+                  <a:srgbClr val="232323"/>
+                </a:solidFill>
+                <a:latin typeface="Calibri"/>
               </a:rPr>
               <a:t>M-D3-02   ·   Poster M-P09</a:t>
             </a:r>
@@ -8972,9 +8972,9 @@
             <a:r>
               <a:rPr sz="1000" b="0">
                 <a:solidFill>
-                  <a:srgbClr val="6B6255"/>
-                </a:solidFill>
-                <a:latin typeface="Arial"/>
+                  <a:srgbClr val="232323"/>
+                </a:solidFill>
+                <a:latin typeface="Calibri"/>
               </a:rPr>
               <a:t>Walking With Farmers</a:t>
             </a:r>
@@ -9011,7 +9011,7 @@
             <a:r>
               <a:rPr sz="3800" b="1">
                 <a:solidFill>
-                  <a:srgbClr val="1F4D2B"/>
+                  <a:srgbClr val="232323"/>
                 </a:solidFill>
                 <a:latin typeface="Georgia"/>
               </a:rPr>
@@ -9035,7 +9035,7 @@
             <a:avLst/>
           </a:prstGeom>
           <a:solidFill>
-            <a:srgbClr val="E2D8C4"/>
+            <a:srgbClr val="6E9CC4"/>
           </a:solidFill>
           <a:ln>
             <a:noFill/>
@@ -9094,9 +9094,9 @@
             <a:r>
               <a:rPr sz="2800" b="0">
                 <a:solidFill>
-                  <a:srgbClr val="20190F"/>
-                </a:solidFill>
-                <a:latin typeface="Arial"/>
+                  <a:srgbClr val="232323"/>
+                </a:solidFill>
+                <a:latin typeface="Calibri"/>
               </a:rPr>
               <a:t>•  Red: every 2 weeks</a:t>
             </a:r>
@@ -9110,9 +9110,9 @@
             <a:r>
               <a:rPr sz="2800" b="0">
                 <a:solidFill>
-                  <a:srgbClr val="20190F"/>
-                </a:solidFill>
-                <a:latin typeface="Arial"/>
+                  <a:srgbClr val="232323"/>
+                </a:solidFill>
+                <a:latin typeface="Calibri"/>
               </a:rPr>
               <a:t>•  Amber: every month</a:t>
             </a:r>
@@ -9126,9 +9126,9 @@
             <a:r>
               <a:rPr sz="2800" b="0">
                 <a:solidFill>
-                  <a:srgbClr val="20190F"/>
-                </a:solidFill>
-                <a:latin typeface="Arial"/>
+                  <a:srgbClr val="232323"/>
+                </a:solidFill>
+                <a:latin typeface="Calibri"/>
               </a:rPr>
               <a:t>•  Green: cluster visit + phone</a:t>
             </a:r>
@@ -9150,11 +9150,11 @@
             <a:avLst/>
           </a:prstGeom>
           <a:solidFill>
-            <a:srgbClr val="FBF6EC"/>
+            <a:srgbClr val="FAF7F0"/>
           </a:solidFill>
           <a:ln w="15875">
             <a:solidFill>
-              <a:srgbClr val="E2D8C4"/>
+              <a:srgbClr val="6E9CC4"/>
             </a:solidFill>
           </a:ln>
           <a:effectLst/>
@@ -9211,9 +9211,9 @@
             <a:r>
               <a:rPr sz="1200" b="1">
                 <a:solidFill>
-                  <a:srgbClr val="C07A1E"/>
-                </a:solidFill>
-                <a:latin typeface="Arial"/>
+                  <a:srgbClr val="D9622B"/>
+                </a:solidFill>
+                <a:latin typeface="Calibri"/>
               </a:rPr>
               <a:t>POSTER ART · M-P09-ART · coming</a:t>
             </a:r>
@@ -9250,7 +9250,7 @@
             <a:r>
               <a:rPr sz="1800" b="1">
                 <a:solidFill>
-                  <a:srgbClr val="1F4D2B"/>
+                  <a:srgbClr val="232323"/>
                 </a:solidFill>
                 <a:latin typeface="Georgia"/>
               </a:rPr>
@@ -9289,9 +9289,9 @@
             <a:r>
               <a:rPr sz="1100" b="0">
                 <a:solidFill>
-                  <a:srgbClr val="20190F"/>
-                </a:solidFill>
-                <a:latin typeface="Arial"/>
+                  <a:srgbClr val="232323"/>
+                </a:solidFill>
+                <a:latin typeface="Calibri"/>
               </a:rPr>
               <a:t>A tall traffic light made from three stacked round shapes, each with a small scene beside it. Top (Red, with a triangle pattern for B&amp;W): a bare, dry garden and a worried farmer — the mentor walking towards them. Middle (Amber/Ochre, with dots): a half-planted garden, farmer working. Bottom (Green/Leaf, with stripes): a lush garden and a farmer showing…</a:t>
             </a:r>
@@ -9312,7 +9312,7 @@
     <p:bg>
       <p:bgPr>
         <a:solidFill>
-          <a:srgbClr val="F7F2E9"/>
+          <a:srgbClr val="FAF7F0"/>
         </a:solidFill>
         <a:effectLst/>
       </p:bgPr>
@@ -9354,9 +9354,9 @@
             <a:r>
               <a:rPr sz="1000" b="0">
                 <a:solidFill>
-                  <a:srgbClr val="6B6255"/>
-                </a:solidFill>
-                <a:latin typeface="Arial"/>
+                  <a:srgbClr val="232323"/>
+                </a:solidFill>
+                <a:latin typeface="Calibri"/>
               </a:rPr>
               <a:t>M-D3-03   ·   Poster M-P09</a:t>
             </a:r>
@@ -9393,9 +9393,9 @@
             <a:r>
               <a:rPr sz="1000" b="0">
                 <a:solidFill>
-                  <a:srgbClr val="6B6255"/>
-                </a:solidFill>
-                <a:latin typeface="Arial"/>
+                  <a:srgbClr val="232323"/>
+                </a:solidFill>
+                <a:latin typeface="Calibri"/>
               </a:rPr>
               <a:t>Walking With Farmers</a:t>
             </a:r>
@@ -9417,7 +9417,7 @@
             <a:avLst/>
           </a:prstGeom>
           <a:solidFill>
-            <a:srgbClr val="C07A1E"/>
+            <a:srgbClr val="D9622B"/>
           </a:solidFill>
           <a:ln>
             <a:noFill/>
@@ -9476,9 +9476,9 @@
             <a:r>
               <a:rPr sz="1400" b="1">
                 <a:solidFill>
-                  <a:srgbClr val="F7F2E9"/>
-                </a:solidFill>
-                <a:latin typeface="Arial"/>
+                  <a:srgbClr val="FAF7F0"/>
+                </a:solidFill>
+                <a:latin typeface="Calibri"/>
               </a:rPr>
               <a:t>YOUR TURN</a:t>
             </a:r>
@@ -9515,7 +9515,7 @@
             <a:r>
               <a:rPr sz="3800" b="1">
                 <a:solidFill>
-                  <a:srgbClr val="1F4D2B"/>
+                  <a:srgbClr val="232323"/>
                 </a:solidFill>
                 <a:latin typeface="Georgia"/>
               </a:rPr>
@@ -9539,7 +9539,7 @@
             <a:avLst/>
           </a:prstGeom>
           <a:solidFill>
-            <a:srgbClr val="E2D8C4"/>
+            <a:srgbClr val="6E9CC4"/>
           </a:solidFill>
           <a:ln>
             <a:noFill/>
@@ -9598,9 +9598,9 @@
             <a:r>
               <a:rPr sz="3000" b="1">
                 <a:solidFill>
-                  <a:srgbClr val="20190F"/>
-                </a:solidFill>
-                <a:latin typeface="Arial"/>
+                  <a:srgbClr val="232323"/>
+                </a:solidFill>
+                <a:latin typeface="Calibri"/>
               </a:rPr>
               <a:t>•  40 cards · R, A, G</a:t>
             </a:r>
@@ -9614,9 +9614,9 @@
             <a:r>
               <a:rPr sz="3000" b="1">
                 <a:solidFill>
-                  <a:srgbClr val="20190F"/>
-                </a:solidFill>
-                <a:latin typeface="Arial"/>
+                  <a:srgbClr val="232323"/>
+                </a:solidFill>
+                <a:latin typeface="Calibri"/>
               </a:rPr>
               <a:t>•  10 minutes · say why</a:t>
             </a:r>
@@ -9637,7 +9637,7 @@
     <p:bg>
       <p:bgPr>
         <a:solidFill>
-          <a:srgbClr val="F7F2E9"/>
+          <a:srgbClr val="FAF7F0"/>
         </a:solidFill>
         <a:effectLst/>
       </p:bgPr>
@@ -9679,9 +9679,9 @@
             <a:r>
               <a:rPr sz="1000" b="0">
                 <a:solidFill>
-                  <a:srgbClr val="6B6255"/>
-                </a:solidFill>
-                <a:latin typeface="Arial"/>
+                  <a:srgbClr val="232323"/>
+                </a:solidFill>
+                <a:latin typeface="Calibri"/>
               </a:rPr>
               <a:t>M-D3-04   ·   Poster M-P10</a:t>
             </a:r>
@@ -9718,9 +9718,9 @@
             <a:r>
               <a:rPr sz="1000" b="0">
                 <a:solidFill>
-                  <a:srgbClr val="6B6255"/>
-                </a:solidFill>
-                <a:latin typeface="Arial"/>
+                  <a:srgbClr val="232323"/>
+                </a:solidFill>
+                <a:latin typeface="Calibri"/>
               </a:rPr>
               <a:t>Walking With Farmers</a:t>
             </a:r>
@@ -9757,7 +9757,7 @@
             <a:r>
               <a:rPr sz="3800" b="1">
                 <a:solidFill>
-                  <a:srgbClr val="1F4D2B"/>
+                  <a:srgbClr val="232323"/>
                 </a:solidFill>
                 <a:latin typeface="Georgia"/>
               </a:rPr>
@@ -9781,7 +9781,7 @@
             <a:avLst/>
           </a:prstGeom>
           <a:solidFill>
-            <a:srgbClr val="E2D8C4"/>
+            <a:srgbClr val="6E9CC4"/>
           </a:solidFill>
           <a:ln>
             <a:noFill/>
@@ -9840,9 +9840,9 @@
             <a:r>
               <a:rPr sz="2400" b="0">
                 <a:solidFill>
-                  <a:srgbClr val="20190F"/>
-                </a:solidFill>
-                <a:latin typeface="Arial"/>
+                  <a:srgbClr val="232323"/>
+                </a:solidFill>
+                <a:latin typeface="Calibri"/>
               </a:rPr>
               <a:t>•  Red × 2 + Amber = visits needed</a:t>
             </a:r>
@@ -9856,9 +9856,9 @@
             <a:r>
               <a:rPr sz="2400" b="0">
                 <a:solidFill>
-                  <a:srgbClr val="20190F"/>
-                </a:solidFill>
-                <a:latin typeface="Arial"/>
+                  <a:srgbClr val="232323"/>
+                </a:solidFill>
+                <a:latin typeface="Calibri"/>
               </a:rPr>
               <a:t>•  Field days × visits a day = available</a:t>
             </a:r>
@@ -9872,9 +9872,9 @@
             <a:r>
               <a:rPr sz="2400" b="0">
                 <a:solidFill>
-                  <a:srgbClr val="20190F"/>
-                </a:solidFill>
-                <a:latin typeface="Arial"/>
+                  <a:srgbClr val="232323"/>
+                </a:solidFill>
+                <a:latin typeface="Calibri"/>
               </a:rPr>
               <a:t>•  Leave spare time</a:t>
             </a:r>
@@ -9896,11 +9896,11 @@
             <a:avLst/>
           </a:prstGeom>
           <a:solidFill>
-            <a:srgbClr val="FBF6EC"/>
+            <a:srgbClr val="FAF7F0"/>
           </a:solidFill>
           <a:ln w="15875">
             <a:solidFill>
-              <a:srgbClr val="E2D8C4"/>
+              <a:srgbClr val="6E9CC4"/>
             </a:solidFill>
           </a:ln>
           <a:effectLst/>
@@ -9957,9 +9957,9 @@
             <a:r>
               <a:rPr sz="1200" b="1">
                 <a:solidFill>
-                  <a:srgbClr val="C07A1E"/>
-                </a:solidFill>
-                <a:latin typeface="Arial"/>
+                  <a:srgbClr val="D9622B"/>
+                </a:solidFill>
+                <a:latin typeface="Calibri"/>
               </a:rPr>
               <a:t>POSTER ART · M-P10-ART · coming</a:t>
             </a:r>
@@ -9996,7 +9996,7 @@
             <a:r>
               <a:rPr sz="1800" b="1">
                 <a:solidFill>
-                  <a:srgbClr val="1F4D2B"/>
+                  <a:srgbClr val="232323"/>
                 </a:solidFill>
                 <a:latin typeface="Georgia"/>
               </a:rPr>
@@ -10035,9 +10035,9 @@
             <a:r>
               <a:rPr sz="1100" b="0">
                 <a:solidFill>
-                  <a:srgbClr val="20190F"/>
-                </a:solidFill>
-                <a:latin typeface="Arial"/>
+                  <a:srgbClr val="232323"/>
+                </a:solidFill>
+                <a:latin typeface="Calibri"/>
               </a:rPr>
               <a:t>A simple map of four villages (A, B, C, D drawn as four clusters of houses with gardens — letters typeset on the layout, not in the art) around a small town with a taxi rank. Five columns below the map, one per weekday, each showing a small figure of the mentor: Monday under a tree with a group of 10 farmers (cluster visit) then walking to 2 houses;…</a:t>
             </a:r>
@@ -10058,7 +10058,7 @@
     <p:bg>
       <p:bgPr>
         <a:solidFill>
-          <a:srgbClr val="F7F2E9"/>
+          <a:srgbClr val="FAF7F0"/>
         </a:solidFill>
         <a:effectLst/>
       </p:bgPr>
@@ -10100,9 +10100,9 @@
             <a:r>
               <a:rPr sz="1000" b="0">
                 <a:solidFill>
-                  <a:srgbClr val="6B6255"/>
-                </a:solidFill>
-                <a:latin typeface="Arial"/>
+                  <a:srgbClr val="232323"/>
+                </a:solidFill>
+                <a:latin typeface="Calibri"/>
               </a:rPr>
               <a:t>M-D3-05   ·   Poster M-P10</a:t>
             </a:r>
@@ -10139,9 +10139,9 @@
             <a:r>
               <a:rPr sz="1000" b="0">
                 <a:solidFill>
-                  <a:srgbClr val="6B6255"/>
-                </a:solidFill>
-                <a:latin typeface="Arial"/>
+                  <a:srgbClr val="232323"/>
+                </a:solidFill>
+                <a:latin typeface="Calibri"/>
               </a:rPr>
               <a:t>Walking With Farmers</a:t>
             </a:r>
@@ -10163,7 +10163,7 @@
             <a:avLst/>
           </a:prstGeom>
           <a:solidFill>
-            <a:srgbClr val="C07A1E"/>
+            <a:srgbClr val="D9622B"/>
           </a:solidFill>
           <a:ln>
             <a:noFill/>
@@ -10222,9 +10222,9 @@
             <a:r>
               <a:rPr sz="1400" b="1">
                 <a:solidFill>
-                  <a:srgbClr val="F7F2E9"/>
-                </a:solidFill>
-                <a:latin typeface="Arial"/>
+                  <a:srgbClr val="FAF7F0"/>
+                </a:solidFill>
+                <a:latin typeface="Calibri"/>
               </a:rPr>
               <a:t>YOUR TURN</a:t>
             </a:r>
@@ -10261,7 +10261,7 @@
             <a:r>
               <a:rPr sz="3800" b="1">
                 <a:solidFill>
-                  <a:srgbClr val="1F4D2B"/>
+                  <a:srgbClr val="232323"/>
                 </a:solidFill>
                 <a:latin typeface="Georgia"/>
               </a:rPr>
@@ -10285,7 +10285,7 @@
             <a:avLst/>
           </a:prstGeom>
           <a:solidFill>
-            <a:srgbClr val="E2D8C4"/>
+            <a:srgbClr val="6E9CC4"/>
           </a:solidFill>
           <a:ln>
             <a:noFill/>
@@ -10344,9 +10344,9 @@
             <a:r>
               <a:rPr sz="3000" b="1">
                 <a:solidFill>
-                  <a:srgbClr val="20190F"/>
-                </a:solidFill>
-                <a:latin typeface="Arial"/>
+                  <a:srgbClr val="232323"/>
+                </a:solidFill>
+                <a:latin typeface="Calibri"/>
               </a:rPr>
               <a:t>•  One cluster a day</a:t>
             </a:r>
@@ -10360,9 +10360,9 @@
             <a:r>
               <a:rPr sz="3000" b="1">
                 <a:solidFill>
-                  <a:srgbClr val="20190F"/>
-                </a:solidFill>
-                <a:latin typeface="Arial"/>
+                  <a:srgbClr val="232323"/>
+                </a:solidFill>
+                <a:latin typeface="Calibri"/>
               </a:rPr>
               <a:t>•  Farthest first, work back</a:t>
             </a:r>
@@ -10376,9 +10376,9 @@
             <a:r>
               <a:rPr sz="3000" b="1">
                 <a:solidFill>
-                  <a:srgbClr val="20190F"/>
-                </a:solidFill>
-                <a:latin typeface="Arial"/>
+                  <a:srgbClr val="232323"/>
+                </a:solidFill>
+                <a:latin typeface="Calibri"/>
               </a:rPr>
               <a:t>•  Friday: phone, records, plan</a:t>
             </a:r>
@@ -10400,11 +10400,11 @@
             <a:avLst/>
           </a:prstGeom>
           <a:solidFill>
-            <a:srgbClr val="FBF6EC"/>
+            <a:srgbClr val="FAF7F0"/>
           </a:solidFill>
           <a:ln w="15875">
             <a:solidFill>
-              <a:srgbClr val="E2D8C4"/>
+              <a:srgbClr val="6E9CC4"/>
             </a:solidFill>
           </a:ln>
           <a:effectLst/>
@@ -10461,9 +10461,9 @@
             <a:r>
               <a:rPr sz="1200" b="1">
                 <a:solidFill>
-                  <a:srgbClr val="C07A1E"/>
-                </a:solidFill>
-                <a:latin typeface="Arial"/>
+                  <a:srgbClr val="D9622B"/>
+                </a:solidFill>
+                <a:latin typeface="Calibri"/>
               </a:rPr>
               <a:t>POSTER ART · M-P10-ART · coming</a:t>
             </a:r>
@@ -10500,7 +10500,7 @@
             <a:r>
               <a:rPr sz="1800" b="1">
                 <a:solidFill>
-                  <a:srgbClr val="1F4D2B"/>
+                  <a:srgbClr val="232323"/>
                 </a:solidFill>
                 <a:latin typeface="Georgia"/>
               </a:rPr>
@@ -10539,9 +10539,9 @@
             <a:r>
               <a:rPr sz="1100" b="0">
                 <a:solidFill>
-                  <a:srgbClr val="20190F"/>
-                </a:solidFill>
-                <a:latin typeface="Arial"/>
+                  <a:srgbClr val="232323"/>
+                </a:solidFill>
+                <a:latin typeface="Calibri"/>
               </a:rPr>
               <a:t>A simple map of four villages (A, B, C, D drawn as four clusters of houses with gardens — letters typeset on the layout, not in the art) around a small town with a taxi rank. Five columns below the map, one per weekday, each showing a small figure of the mentor: Monday under a tree with a group of 10 farmers (cluster visit) then walking to 2 houses;…</a:t>
             </a:r>
@@ -10562,7 +10562,7 @@
     <p:bg>
       <p:bgPr>
         <a:solidFill>
-          <a:srgbClr val="F7F2E9"/>
+          <a:srgbClr val="FAF7F0"/>
         </a:solidFill>
         <a:effectLst/>
       </p:bgPr>
@@ -10604,9 +10604,9 @@
             <a:r>
               <a:rPr sz="1000" b="0">
                 <a:solidFill>
-                  <a:srgbClr val="6B6255"/>
-                </a:solidFill>
-                <a:latin typeface="Arial"/>
+                  <a:srgbClr val="232323"/>
+                </a:solidFill>
+                <a:latin typeface="Calibri"/>
               </a:rPr>
               <a:t>M-D3-06   ·   Poster M-P11</a:t>
             </a:r>
@@ -10643,9 +10643,9 @@
             <a:r>
               <a:rPr sz="1000" b="0">
                 <a:solidFill>
-                  <a:srgbClr val="6B6255"/>
-                </a:solidFill>
-                <a:latin typeface="Arial"/>
+                  <a:srgbClr val="232323"/>
+                </a:solidFill>
+                <a:latin typeface="Calibri"/>
               </a:rPr>
               <a:t>Walking With Farmers</a:t>
             </a:r>
@@ -10682,7 +10682,7 @@
             <a:r>
               <a:rPr sz="3800" b="1">
                 <a:solidFill>
-                  <a:srgbClr val="1F4D2B"/>
+                  <a:srgbClr val="232323"/>
                 </a:solidFill>
                 <a:latin typeface="Georgia"/>
               </a:rPr>
@@ -10706,7 +10706,7 @@
             <a:avLst/>
           </a:prstGeom>
           <a:solidFill>
-            <a:srgbClr val="E2D8C4"/>
+            <a:srgbClr val="6E9CC4"/>
           </a:solidFill>
           <a:ln>
             <a:noFill/>
@@ -10765,9 +10765,9 @@
             <a:r>
               <a:rPr sz="2800" b="0">
                 <a:solidFill>
-                  <a:srgbClr val="20190F"/>
-                </a:solidFill>
-                <a:latin typeface="Arial"/>
+                  <a:srgbClr val="232323"/>
+                </a:solidFill>
+                <a:latin typeface="Calibri"/>
               </a:rPr>
               <a:t>•  2–3 hours · 8–12 farmers</a:t>
             </a:r>
@@ -10781,9 +10781,9 @@
             <a:r>
               <a:rPr sz="2800" b="0">
                 <a:solidFill>
-                  <a:srgbClr val="20190F"/>
-                </a:solidFill>
-                <a:latin typeface="Arial"/>
+                  <a:srgbClr val="232323"/>
+                </a:solidFill>
+                <a:latin typeface="Calibri"/>
               </a:rPr>
               <a:t>•  Host teaches, farmers try</a:t>
             </a:r>
@@ -10797,9 +10797,9 @@
             <a:r>
               <a:rPr sz="2800" b="0">
                 <a:solidFill>
-                  <a:srgbClr val="20190F"/>
-                </a:solidFill>
-                <a:latin typeface="Arial"/>
+                  <a:srgbClr val="232323"/>
+                </a:solidFill>
+                <a:latin typeface="Calibri"/>
               </a:rPr>
               <a:t>•  Rotate the host monthly</a:t>
             </a:r>
@@ -10821,11 +10821,11 @@
             <a:avLst/>
           </a:prstGeom>
           <a:solidFill>
-            <a:srgbClr val="FBF6EC"/>
+            <a:srgbClr val="FAF7F0"/>
           </a:solidFill>
           <a:ln w="15875">
             <a:solidFill>
-              <a:srgbClr val="E2D8C4"/>
+              <a:srgbClr val="6E9CC4"/>
             </a:solidFill>
           </a:ln>
           <a:effectLst/>
@@ -10882,9 +10882,9 @@
             <a:r>
               <a:rPr sz="1200" b="1">
                 <a:solidFill>
-                  <a:srgbClr val="C07A1E"/>
-                </a:solidFill>
-                <a:latin typeface="Arial"/>
+                  <a:srgbClr val="D9622B"/>
+                </a:solidFill>
+                <a:latin typeface="Calibri"/>
               </a:rPr>
               <a:t>POSTER ART · M-P11-ART · coming</a:t>
             </a:r>
@@ -10921,7 +10921,7 @@
             <a:r>
               <a:rPr sz="1800" b="1">
                 <a:solidFill>
-                  <a:srgbClr val="1F4D2B"/>
+                  <a:srgbClr val="232323"/>
                 </a:solidFill>
                 <a:latin typeface="Georgia"/>
               </a:rPr>
@@ -10960,9 +10960,9 @@
             <a:r>
               <a:rPr sz="1100" b="0">
                 <a:solidFill>
-                  <a:srgbClr val="20190F"/>
-                </a:solidFill>
-                <a:latin typeface="Arial"/>
+                  <a:srgbClr val="232323"/>
+                </a:solidFill>
+                <a:latin typeface="Calibri"/>
               </a:rPr>
               <a:t>A host farmer's garden with 10 farmers of mixed ages and genders. In one corner the host gogo leads a tour, pointing at a mulched bed; in the middle, three small groups of 3–4 kneeling at different stations (spacing string, seedling tray, a bucket); at the front, everyone sitting in a circle in the shade of a tree; the mentor sits in the circle, not…</a:t>
             </a:r>
@@ -10983,7 +10983,7 @@
     <p:bg>
       <p:bgPr>
         <a:solidFill>
-          <a:srgbClr val="F7F2E9"/>
+          <a:srgbClr val="FAF7F0"/>
         </a:solidFill>
         <a:effectLst/>
       </p:bgPr>
@@ -11025,9 +11025,9 @@
             <a:r>
               <a:rPr sz="1000" b="0">
                 <a:solidFill>
-                  <a:srgbClr val="6B6255"/>
-                </a:solidFill>
-                <a:latin typeface="Arial"/>
+                  <a:srgbClr val="232323"/>
+                </a:solidFill>
+                <a:latin typeface="Calibri"/>
               </a:rPr>
               <a:t>M-D3-07   ·   Poster M-P11</a:t>
             </a:r>
@@ -11064,9 +11064,9 @@
             <a:r>
               <a:rPr sz="1000" b="0">
                 <a:solidFill>
-                  <a:srgbClr val="6B6255"/>
-                </a:solidFill>
-                <a:latin typeface="Arial"/>
+                  <a:srgbClr val="232323"/>
+                </a:solidFill>
+                <a:latin typeface="Calibri"/>
               </a:rPr>
               <a:t>Walking With Farmers</a:t>
             </a:r>
@@ -11088,7 +11088,7 @@
             <a:avLst/>
           </a:prstGeom>
           <a:solidFill>
-            <a:srgbClr val="C07A1E"/>
+            <a:srgbClr val="D9622B"/>
           </a:solidFill>
           <a:ln>
             <a:noFill/>
@@ -11147,9 +11147,9 @@
             <a:r>
               <a:rPr sz="1400" b="1">
                 <a:solidFill>
-                  <a:srgbClr val="F7F2E9"/>
-                </a:solidFill>
-                <a:latin typeface="Arial"/>
+                  <a:srgbClr val="FAF7F0"/>
+                </a:solidFill>
+                <a:latin typeface="Calibri"/>
               </a:rPr>
               <a:t>YOUR TURN</a:t>
             </a:r>
@@ -11186,7 +11186,7 @@
             <a:r>
               <a:rPr sz="3800" b="1">
                 <a:solidFill>
-                  <a:srgbClr val="1F4D2B"/>
+                  <a:srgbClr val="232323"/>
                 </a:solidFill>
                 <a:latin typeface="Georgia"/>
               </a:rPr>
@@ -11210,7 +11210,7 @@
             <a:avLst/>
           </a:prstGeom>
           <a:solidFill>
-            <a:srgbClr val="E2D8C4"/>
+            <a:srgbClr val="6E9CC4"/>
           </a:solidFill>
           <a:ln>
             <a:noFill/>
@@ -11269,9 +11269,9 @@
             <a:r>
               <a:rPr sz="2600" b="1">
                 <a:solidFill>
-                  <a:srgbClr val="20190F"/>
-                </a:solidFill>
-                <a:latin typeface="Arial"/>
+                  <a:srgbClr val="232323"/>
+                </a:solidFill>
+                <a:latin typeface="Calibri"/>
               </a:rPr>
               <a:t>•  Plan a cluster visit for your month</a:t>
             </a:r>
@@ -11285,9 +11285,9 @@
             <a:r>
               <a:rPr sz="2600" b="1">
                 <a:solidFill>
-                  <a:srgbClr val="20190F"/>
-                </a:solidFill>
-                <a:latin typeface="Arial"/>
+                  <a:srgbClr val="232323"/>
+                </a:solidFill>
+                <a:latin typeface="Calibri"/>
               </a:rPr>
               <a:t>•  Run 10 minutes on another group</a:t>
             </a:r>
@@ -11309,11 +11309,11 @@
             <a:avLst/>
           </a:prstGeom>
           <a:solidFill>
-            <a:srgbClr val="FBF6EC"/>
+            <a:srgbClr val="FAF7F0"/>
           </a:solidFill>
           <a:ln w="15875">
             <a:solidFill>
-              <a:srgbClr val="E2D8C4"/>
+              <a:srgbClr val="6E9CC4"/>
             </a:solidFill>
           </a:ln>
           <a:effectLst/>
@@ -11370,9 +11370,9 @@
             <a:r>
               <a:rPr sz="1200" b="1">
                 <a:solidFill>
-                  <a:srgbClr val="C07A1E"/>
-                </a:solidFill>
-                <a:latin typeface="Arial"/>
+                  <a:srgbClr val="D9622B"/>
+                </a:solidFill>
+                <a:latin typeface="Calibri"/>
               </a:rPr>
               <a:t>PHOTO · M-PHO-02 · coming</a:t>
             </a:r>
@@ -11409,7 +11409,7 @@
             <a:r>
               <a:rPr sz="1800" b="1">
                 <a:solidFill>
-                  <a:srgbClr val="1F4D2B"/>
+                  <a:srgbClr val="232323"/>
                 </a:solidFill>
                 <a:latin typeface="Georgia"/>
               </a:rPr>
@@ -11448,9 +11448,9 @@
             <a:r>
               <a:rPr sz="1100" b="0">
                 <a:solidFill>
-                  <a:srgbClr val="20190F"/>
-                </a:solidFill>
-                <a:latin typeface="Arial"/>
+                  <a:srgbClr val="232323"/>
+                </a:solidFill>
+                <a:latin typeface="Calibri"/>
               </a:rPr>
               <a:t>The share circle at a cluster visit, taken from outside the circle, all participants consenting (green-sticker holders out of frame). Landscape. Replaces M-P11-ART on the slide when available.</a:t>
             </a:r>
@@ -11471,7 +11471,7 @@
     <p:bg>
       <p:bgPr>
         <a:solidFill>
-          <a:srgbClr val="F7F2E9"/>
+          <a:srgbClr val="FAF7F0"/>
         </a:solidFill>
         <a:effectLst/>
       </p:bgPr>
@@ -11513,9 +11513,9 @@
             <a:r>
               <a:rPr sz="1000" b="0">
                 <a:solidFill>
-                  <a:srgbClr val="6B6255"/>
-                </a:solidFill>
-                <a:latin typeface="Arial"/>
+                  <a:srgbClr val="232323"/>
+                </a:solidFill>
+                <a:latin typeface="Calibri"/>
               </a:rPr>
               <a:t>M-D3-08   ·   Poster M-P13</a:t>
             </a:r>
@@ -11552,9 +11552,9 @@
             <a:r>
               <a:rPr sz="1000" b="0">
                 <a:solidFill>
-                  <a:srgbClr val="6B6255"/>
-                </a:solidFill>
-                <a:latin typeface="Arial"/>
+                  <a:srgbClr val="232323"/>
+                </a:solidFill>
+                <a:latin typeface="Calibri"/>
               </a:rPr>
               <a:t>Walking With Farmers</a:t>
             </a:r>
@@ -11591,7 +11591,7 @@
             <a:r>
               <a:rPr sz="3800" b="1">
                 <a:solidFill>
-                  <a:srgbClr val="1F4D2B"/>
+                  <a:srgbClr val="232323"/>
                 </a:solidFill>
                 <a:latin typeface="Georgia"/>
               </a:rPr>
@@ -11615,7 +11615,7 @@
             <a:avLst/>
           </a:prstGeom>
           <a:solidFill>
-            <a:srgbClr val="E2D8C4"/>
+            <a:srgbClr val="6E9CC4"/>
           </a:solidFill>
           <a:ln>
             <a:noFill/>
@@ -11674,9 +11674,9 @@
             <a:r>
               <a:rPr sz="2800" b="0">
                 <a:solidFill>
-                  <a:srgbClr val="20190F"/>
-                </a:solidFill>
-                <a:latin typeface="Arial"/>
+                  <a:srgbClr val="232323"/>
+                </a:solidFill>
+                <a:latin typeface="Calibri"/>
               </a:rPr>
               <a:t>•  Farmers show farmers</a:t>
             </a:r>
@@ -11690,9 +11690,9 @@
             <a:r>
               <a:rPr sz="2800" b="0">
                 <a:solidFill>
-                  <a:srgbClr val="20190F"/>
-                </a:solidFill>
-                <a:latin typeface="Arial"/>
+                  <a:srgbClr val="232323"/>
+                </a:solidFill>
+                <a:latin typeface="Calibri"/>
               </a:rPr>
               <a:t>•  First harvest · season review</a:t>
             </a:r>
@@ -11706,9 +11706,9 @@
             <a:r>
               <a:rPr sz="2800" b="0">
                 <a:solidFill>
-                  <a:srgbClr val="20190F"/>
-                </a:solidFill>
-                <a:latin typeface="Arial"/>
+                  <a:srgbClr val="232323"/>
+                </a:solidFill>
+                <a:latin typeface="Calibri"/>
               </a:rPr>
               <a:t>•  20 to 60 people</a:t>
             </a:r>
@@ -11730,11 +11730,11 @@
             <a:avLst/>
           </a:prstGeom>
           <a:solidFill>
-            <a:srgbClr val="FBF6EC"/>
+            <a:srgbClr val="FAF7F0"/>
           </a:solidFill>
           <a:ln w="15875">
             <a:solidFill>
-              <a:srgbClr val="E2D8C4"/>
+              <a:srgbClr val="6E9CC4"/>
             </a:solidFill>
           </a:ln>
           <a:effectLst/>
@@ -11791,9 +11791,9 @@
             <a:r>
               <a:rPr sz="1200" b="1">
                 <a:solidFill>
-                  <a:srgbClr val="C07A1E"/>
-                </a:solidFill>
-                <a:latin typeface="Arial"/>
+                  <a:srgbClr val="D9622B"/>
+                </a:solidFill>
+                <a:latin typeface="Calibri"/>
               </a:rPr>
               <a:t>IMAGE · M-IMG-07 · coming</a:t>
             </a:r>
@@ -11830,7 +11830,7 @@
             <a:r>
               <a:rPr sz="1800" b="1">
                 <a:solidFill>
-                  <a:srgbClr val="1F4D2B"/>
+                  <a:srgbClr val="232323"/>
                 </a:solidFill>
                 <a:latin typeface="Georgia"/>
               </a:rPr>
@@ -11869,9 +11869,9 @@
             <a:r>
               <a:rPr sz="1100" b="0">
                 <a:solidFill>
-                  <a:srgbClr val="20190F"/>
-                </a:solidFill>
-                <a:latin typeface="Arial"/>
+                  <a:srgbClr val="232323"/>
+                </a:solidFill>
+                <a:latin typeface="Calibri"/>
               </a:rPr>
               <a:t>A lively half-day event in a community garden: 30–40 people; a farmer presenting at a bed with a spacing string; a table of produce with a hanging scale; elders on chairs in shade; a few children with adults; a buyer (spaza owner in an apron) talking with a farmer. 16:9.</a:t>
             </a:r>
@@ -11892,7 +11892,7 @@
     <p:bg>
       <p:bgPr>
         <a:solidFill>
-          <a:srgbClr val="F7F2E9"/>
+          <a:srgbClr val="FAF7F0"/>
         </a:solidFill>
         <a:effectLst/>
       </p:bgPr>
@@ -11934,9 +11934,9 @@
             <a:r>
               <a:rPr sz="1000" b="0">
                 <a:solidFill>
-                  <a:srgbClr val="6B6255"/>
-                </a:solidFill>
-                <a:latin typeface="Arial"/>
+                  <a:srgbClr val="232323"/>
+                </a:solidFill>
+                <a:latin typeface="Calibri"/>
               </a:rPr>
               <a:t>M-D3-09   ·   Poster M-P12</a:t>
             </a:r>
@@ -11973,9 +11973,9 @@
             <a:r>
               <a:rPr sz="1000" b="0">
                 <a:solidFill>
-                  <a:srgbClr val="6B6255"/>
-                </a:solidFill>
-                <a:latin typeface="Arial"/>
+                  <a:srgbClr val="232323"/>
+                </a:solidFill>
+                <a:latin typeface="Calibri"/>
               </a:rPr>
               <a:t>Walking With Farmers</a:t>
             </a:r>
@@ -12012,7 +12012,7 @@
             <a:r>
               <a:rPr sz="3800" b="1">
                 <a:solidFill>
-                  <a:srgbClr val="1F4D2B"/>
+                  <a:srgbClr val="232323"/>
                 </a:solidFill>
                 <a:latin typeface="Georgia"/>
               </a:rPr>
@@ -12036,7 +12036,7 @@
             <a:avLst/>
           </a:prstGeom>
           <a:solidFill>
-            <a:srgbClr val="E2D8C4"/>
+            <a:srgbClr val="6E9CC4"/>
           </a:solidFill>
           <a:ln>
             <a:noFill/>
@@ -12095,9 +12095,9 @@
             <a:r>
               <a:rPr sz="2800" b="0">
                 <a:solidFill>
-                  <a:srgbClr val="20190F"/>
-                </a:solidFill>
-                <a:latin typeface="Arial"/>
+                  <a:srgbClr val="232323"/>
+                </a:solidFill>
+                <a:latin typeface="Calibri"/>
               </a:rPr>
               <a:t>•  Greet · Look back · Show me</a:t>
             </a:r>
@@ -12111,9 +12111,9 @@
             <a:r>
               <a:rPr sz="2800" b="0">
                 <a:solidFill>
-                  <a:srgbClr val="20190F"/>
-                </a:solidFill>
-                <a:latin typeface="Arial"/>
+                  <a:srgbClr val="232323"/>
+                </a:solidFill>
+                <a:latin typeface="Calibri"/>
               </a:rPr>
               <a:t>•  What's next? · Date</a:t>
             </a:r>
@@ -12135,11 +12135,11 @@
             <a:avLst/>
           </a:prstGeom>
           <a:solidFill>
-            <a:srgbClr val="FBF6EC"/>
+            <a:srgbClr val="FAF7F0"/>
           </a:solidFill>
           <a:ln w="15875">
             <a:solidFill>
-              <a:srgbClr val="E2D8C4"/>
+              <a:srgbClr val="6E9CC4"/>
             </a:solidFill>
           </a:ln>
           <a:effectLst/>
@@ -12196,9 +12196,9 @@
             <a:r>
               <a:rPr sz="1200" b="1">
                 <a:solidFill>
-                  <a:srgbClr val="C07A1E"/>
-                </a:solidFill>
-                <a:latin typeface="Arial"/>
+                  <a:srgbClr val="D9622B"/>
+                </a:solidFill>
+                <a:latin typeface="Calibri"/>
               </a:rPr>
               <a:t>POSTER ART · M-P12-ART · coming</a:t>
             </a:r>
@@ -12235,7 +12235,7 @@
             <a:r>
               <a:rPr sz="1800" b="1">
                 <a:solidFill>
-                  <a:srgbClr val="1F4D2B"/>
+                  <a:srgbClr val="232323"/>
                 </a:solidFill>
                 <a:latin typeface="Georgia"/>
               </a:rPr>
@@ -12274,9 +12274,9 @@
             <a:r>
               <a:rPr sz="1100" b="0">
                 <a:solidFill>
-                  <a:srgbClr val="20190F"/>
-                </a:solidFill>
-                <a:latin typeface="Arial"/>
+                  <a:srgbClr val="232323"/>
+                </a:solidFill>
+                <a:latin typeface="Calibri"/>
               </a:rPr>
               <a:t>Split scene. Left: the mentor at a table with a basic phone to her ear and a notebook. Right: the farmer in his garden, phone to ear, looking at a mulched bed; a second small inset shows him taking a photo of the bed with a smartphone. A thin line (like a sound wave) connects the two phones.</a:t>
             </a:r>

--- a/courses/build/mentor-3day/M-D3.pptx
+++ b/courses/build/mentor-3day/M-D3.pptx
@@ -763,7 +763,7 @@
           </a:p>
           <a:p>
             <a:r>
-              <a:t>Clip M-ANI-05: public/course-animations/market-community/watch-04-farm-record.mp4</a:t>
+              <a:t>Clip M-ANI-05: public/course-media/mentor-3day/M-ANI-05.mp4</a:t>
             </a:r>
           </a:p>
         </p:txBody>
@@ -1608,7 +1608,7 @@
           </a:p>
           <a:p>
             <a:r>
-              <a:t>Clip M-ANI-04: public/course-animations/market-community/watch-14-community-network.mp4</a:t>
+              <a:t>Clip M-ANI-04: public/course-media/mentor-3day/M-ANI-04.mp4</a:t>
             </a:r>
           </a:p>
         </p:txBody>
